--- a/apps/resources/bundled_files/6-klass-bolchok-ondu-procent-sabak.pptx
+++ b/apps/resources/bundled_files/6-klass-bolchok-ondu-procent-sabak.pptx
@@ -5196,7 +5196,7 @@
                 </a:solidFill>
                 <a:latin typeface="PT Sans"/>
               </a:rPr>
-              <a:t>6-класс · Математика</a:t>
+              <a:t/>
             </a:r>
           </a:p>
         </p:txBody>
@@ -5400,7 +5400,7 @@
                 </a:solidFill>
                 <a:latin typeface="PT Sans"/>
               </a:rPr>
-              <a:t>Китеп: Стандарт 2018, 6-класс: «Ондук бөлчөктөр», «Пайыз»; Cambridge Stage 6. Даярдык: 5-класстын «Кадимки бөлчөктөр» пакети. Мазмуну оригиналдуу.</a:t>
+              <a:t>Китеп: Стандарт 2018, 6-класс: «Ондук бөлчөктөр», «Пайыз». Даярдык: 5-класстын «Кадимки бөлчөктөр» пакети. Мазмуну оригиналдуу.</a:t>
             </a:r>
           </a:p>
         </p:txBody>
@@ -5688,7 +5688,7 @@
                 </a:solidFill>
                 <a:latin typeface="PT Sans"/>
               </a:rPr>
-              <a:t>6-класс ›</a:t>
+              <a:t/>
             </a:r>
           </a:p>
           <a:p>
@@ -6621,7 +6621,7 @@
                 </a:solidFill>
                 <a:latin typeface="PT Sans"/>
               </a:rPr>
-              <a:t>6-класс ›</a:t>
+              <a:t/>
             </a:r>
           </a:p>
           <a:p>
@@ -17240,7 +17240,7 @@
                 </a:solidFill>
                 <a:latin typeface="PT Sans"/>
               </a:rPr>
-              <a:t>6-класс ›</a:t>
+              <a:t/>
             </a:r>
           </a:p>
           <a:p>
@@ -19896,7 +19896,7 @@
                 </a:solidFill>
                 <a:latin typeface="PT Sans"/>
               </a:rPr>
-              <a:t>6-класс ›</a:t>
+              <a:t/>
             </a:r>
           </a:p>
           <a:p>
@@ -21479,7 +21479,7 @@
                 </a:solidFill>
                 <a:latin typeface="PT Sans"/>
               </a:rPr>
-              <a:t>6-класс ›</a:t>
+              <a:t/>
             </a:r>
           </a:p>
           <a:p>
@@ -22269,7 +22269,7 @@
                 </a:solidFill>
                 <a:latin typeface="PT Sans"/>
               </a:rPr>
-              <a:t>6-класс ›</a:t>
+              <a:t/>
             </a:r>
           </a:p>
           <a:p>
@@ -23059,7 +23059,7 @@
                 </a:solidFill>
                 <a:latin typeface="PT Sans"/>
               </a:rPr>
-              <a:t>6-класс ›</a:t>
+              <a:t/>
             </a:r>
           </a:p>
           <a:p>
@@ -24725,7 +24725,7 @@
                 </a:solidFill>
                 <a:latin typeface="PT Sans"/>
               </a:rPr>
-              <a:t>6-класс ›</a:t>
+              <a:t/>
             </a:r>
           </a:p>
           <a:p>
@@ -25809,7 +25809,7 @@
                 </a:solidFill>
                 <a:latin typeface="PT Sans"/>
               </a:rPr>
-              <a:t>6-класс ›</a:t>
+              <a:t/>
             </a:r>
           </a:p>
           <a:p>
@@ -27339,7 +27339,7 @@
                 </a:solidFill>
                 <a:latin typeface="PT Sans"/>
               </a:rPr>
-              <a:t>6-класс ›</a:t>
+              <a:t/>
             </a:r>
           </a:p>
           <a:p>
@@ -29150,7 +29150,7 @@
                 </a:solidFill>
                 <a:latin typeface="PT Sans"/>
               </a:rPr>
-              <a:t>6-класс ›</a:t>
+              <a:t/>
             </a:r>
           </a:p>
           <a:p>
@@ -30427,7 +30427,7 @@
                 </a:solidFill>
                 <a:latin typeface="PT Sans"/>
               </a:rPr>
-              <a:t>6-класс ›</a:t>
+              <a:t/>
             </a:r>
           </a:p>
           <a:p>
@@ -31855,7 +31855,7 @@
                 </a:solidFill>
                 <a:latin typeface="PT Sans"/>
               </a:rPr>
-              <a:t>6-класс ›</a:t>
+              <a:t/>
             </a:r>
           </a:p>
           <a:p>
@@ -33311,7 +33311,7 @@
                 </a:solidFill>
                 <a:latin typeface="PT Sans"/>
               </a:rPr>
-              <a:t>6-класс ›</a:t>
+              <a:t/>
             </a:r>
           </a:p>
           <a:p>
@@ -34393,7 +34393,7 @@
                 </a:solidFill>
                 <a:latin typeface="PT Sans"/>
               </a:rPr>
-              <a:t>6-класс ›</a:t>
+              <a:t/>
             </a:r>
           </a:p>
           <a:p>
@@ -35193,7 +35193,7 @@
                 </a:solidFill>
                 <a:latin typeface="PT Sans"/>
               </a:rPr>
-              <a:t>6-класс ›</a:t>
+              <a:t/>
             </a:r>
           </a:p>
           <a:p>
@@ -36034,7 +36034,7 @@
                 </a:solidFill>
                 <a:latin typeface="PT Sans"/>
               </a:rPr>
-              <a:t>6-класс ›</a:t>
+              <a:t/>
             </a:r>
           </a:p>
           <a:p>
@@ -36983,7 +36983,7 @@
                 </a:solidFill>
                 <a:latin typeface="PT Sans"/>
               </a:rPr>
-              <a:t>6-класс ›</a:t>
+              <a:t/>
             </a:r>
           </a:p>
           <a:p>
@@ -38437,7 +38437,7 @@
                 </a:solidFill>
                 <a:latin typeface="PT Sans"/>
               </a:rPr>
-              <a:t>6-класс ›</a:t>
+              <a:t/>
             </a:r>
           </a:p>
           <a:p>
@@ -39183,7 +39183,7 @@
                 </a:solidFill>
                 <a:latin typeface="PT Sans"/>
               </a:rPr>
-              <a:t>6-класс ›</a:t>
+              <a:t/>
             </a:r>
           </a:p>
           <a:p>
@@ -39991,7 +39991,7 @@
                 </a:solidFill>
                 <a:latin typeface="PT Sans"/>
               </a:rPr>
-              <a:t>6-класс ›</a:t>
+              <a:t/>
             </a:r>
           </a:p>
           <a:p>
@@ -41182,7 +41182,7 @@
                 </a:solidFill>
                 <a:latin typeface="PT Sans"/>
               </a:rPr>
-              <a:t>6-класс ›</a:t>
+              <a:t/>
             </a:r>
           </a:p>
           <a:p>
@@ -42361,7 +42361,7 @@
                 </a:solidFill>
                 <a:latin typeface="PT Sans"/>
               </a:rPr>
-              <a:t>6-класс ›</a:t>
+              <a:t/>
             </a:r>
           </a:p>
           <a:p>
@@ -42542,7 +42542,7 @@
                 </a:solidFill>
                 <a:latin typeface="PT Sans"/>
               </a:rPr>
-              <a:t>4-класс</a:t>
+              <a:t/>
             </a:r>
           </a:p>
         </p:txBody>
@@ -42722,7 +42722,7 @@
                 </a:solidFill>
                 <a:latin typeface="PT Sans"/>
               </a:rPr>
-              <a:t>5-класс</a:t>
+              <a:t/>
             </a:r>
           </a:p>
         </p:txBody>
@@ -42902,7 +42902,7 @@
                 </a:solidFill>
                 <a:latin typeface="PT Sans"/>
               </a:rPr>
-              <a:t>6-класс</a:t>
+              <a:t/>
             </a:r>
           </a:p>
         </p:txBody>
@@ -43558,7 +43558,7 @@
                 </a:solidFill>
                 <a:latin typeface="PT Sans"/>
               </a:rPr>
-              <a:t>6-класс ›</a:t>
+              <a:t/>
             </a:r>
           </a:p>
           <a:p>
@@ -44706,7 +44706,7 @@
                 </a:solidFill>
                 <a:latin typeface="PT Sans"/>
               </a:rPr>
-              <a:t>6-класс ›</a:t>
+              <a:t/>
             </a:r>
           </a:p>
           <a:p>

--- a/apps/resources/bundled_files/6-klass-bolchok-ondu-procent-sabak.pptx
+++ b/apps/resources/bundled_files/6-klass-bolchok-ondu-procent-sabak.pptx
@@ -1582,7 +1582,7 @@
           <a:lstStyle/>
           <a:p>
             <a:r>
-              <a:t>Ой жүгүртүү маданияты (Wenxi Lee, 2.6).</a:t>
+              <a:t>Ой жүгүртүү маданияты (Wenxi Lee, 2,6).</a:t>
             </a:r>
           </a:p>
         </p:txBody>
